--- a/supplementary/SOC_Triage_Agent_Track2.pptx
+++ b/supplementary/SOC_Triage_Agent_Track2.pptx
@@ -4784,7 +4784,7 @@
         <p:spPr>
           <a:xfrm>
             <a:off x="640080" y="4206240"/>
-            <a:ext cx="10607040" cy="2011680"/>
+            <a:ext cx="10607040" cy="2531444"/>
           </a:xfrm>
           <a:prstGeom prst="rect">
             <a:avLst/>
@@ -4886,6 +4886,71 @@
               </a:rPr>
               <a:t>agent logic built and fully tested against a mock LLM client first, then wired to the live Radeon-served model</a:t>
             </a:r>
+          </a:p>
+          <a:p>
+            <a:pPr marL="0" indent="0">
+              <a:lnSpc>
+                <a:spcPct val="150000"/>
+              </a:lnSpc>
+              <a:buNone/>
+            </a:pPr>
+            <a:endParaRPr lang="en-US" sz="1350" dirty="0">
+              <a:solidFill>
+                <a:srgbClr val="D9E2F7"/>
+              </a:solidFill>
+              <a:latin typeface="Calibri" pitchFamily="34" charset="0"/>
+              <a:ea typeface="Calibri" pitchFamily="34" charset="-122"/>
+              <a:cs typeface="Calibri" pitchFamily="34" charset="-120"/>
+            </a:endParaRPr>
+          </a:p>
+          <a:p>
+            <a:pPr marL="0" indent="0">
+              <a:lnSpc>
+                <a:spcPct val="150000"/>
+              </a:lnSpc>
+              <a:buNone/>
+            </a:pPr>
+            <a:r>
+              <a:rPr lang="en-US" sz="1350" dirty="0">
+                <a:solidFill>
+                  <a:srgbClr val="D9E2F7"/>
+                </a:solidFill>
+                <a:latin typeface="Calibri" pitchFamily="34" charset="0"/>
+                <a:ea typeface="Calibri" pitchFamily="34" charset="-122"/>
+                <a:cs typeface="Calibri" pitchFamily="34" charset="-120"/>
+              </a:rPr>
+              <a:t>**Why Qwen3-8B, not a cloud API:** AMD's Token Factory (the free, cloud-hosted  Model API) requires a mainland China phone number for account verification,  which wasn't available to us. Rather than depend on a cloud API we couldn't  even register for, this reinforced the case for genuine local deployment —  Qwen3-8B was downloadable via </a:t>
+            </a:r>
+            <a:r>
+              <a:rPr lang="en-US" sz="1350" dirty="0" err="1">
+                <a:solidFill>
+                  <a:srgbClr val="D9E2F7"/>
+                </a:solidFill>
+                <a:latin typeface="Calibri" pitchFamily="34" charset="0"/>
+                <a:ea typeface="Calibri" pitchFamily="34" charset="-122"/>
+                <a:cs typeface="Calibri" pitchFamily="34" charset="-120"/>
+              </a:rPr>
+              <a:t>ModelScope</a:t>
+            </a:r>
+            <a:r>
+              <a:rPr lang="en-US" sz="1350" dirty="0">
+                <a:solidFill>
+                  <a:srgbClr val="D9E2F7"/>
+                </a:solidFill>
+                <a:latin typeface="Calibri" pitchFamily="34" charset="0"/>
+                <a:ea typeface="Calibri" pitchFamily="34" charset="-122"/>
+                <a:cs typeface="Calibri" pitchFamily="34" charset="-120"/>
+              </a:rPr>
+              <a:t> (reachable from the sandbox  network, unlike huggingface.co) with no account gating at all, letting the  entire inference pipeline run privately, on the Radeon GPU itself, exactly  as Track 2 asks for.</a:t>
+            </a:r>
+          </a:p>
+          <a:p>
+            <a:pPr marL="0" indent="0">
+              <a:lnSpc>
+                <a:spcPct val="150000"/>
+              </a:lnSpc>
+              <a:buNone/>
+            </a:pPr>
             <a:endParaRPr lang="en-US" sz="1350" dirty="0"/>
           </a:p>
         </p:txBody>
